--- a/mqtt/presentation/prezentacija.pptx
+++ b/mqtt/presentation/prezentacija.pptx
@@ -5349,7 +5349,7 @@
                   <a:srgbClr val="000000"/>
                 </a:solidFill>
               </a:rPr>
-              <a:t>kolega</a:t>
+              <a:t>264k msg/s</a:t>
             </a:r>
           </a:p>
         </p:txBody>
@@ -5382,7 +5382,7 @@
                   <a:srgbClr val="000000"/>
                 </a:solidFill>
               </a:rPr>
-              <a:t>kolega</a:t>
+              <a:t>~10 ms*</a:t>
             </a:r>
           </a:p>
         </p:txBody>
@@ -5415,7 +5415,7 @@
                   <a:srgbClr val="000000"/>
                 </a:solidFill>
               </a:rPr>
-              <a:t>kolega</a:t>
+              <a:t>104%</a:t>
             </a:r>
           </a:p>
         </p:txBody>
@@ -5448,7 +5448,7 @@
                   <a:srgbClr val="000000"/>
                 </a:solidFill>
               </a:rPr>
-              <a:t>~512 MB+</a:t>
+              <a:t>~1.1 GB</a:t>
             </a:r>
           </a:p>
         </p:txBody>
@@ -5514,7 +5514,7 @@
                   <a:srgbClr val="000000"/>
                 </a:solidFill>
               </a:rPr>
-              <a:t>kolega</a:t>
+              <a:t>246k msg/s</a:t>
             </a:r>
           </a:p>
         </p:txBody>
@@ -5547,7 +5547,7 @@
                   <a:srgbClr val="000000"/>
                 </a:solidFill>
               </a:rPr>
-              <a:t>kolega</a:t>
+              <a:t>~10 ms*</a:t>
             </a:r>
           </a:p>
         </p:txBody>
@@ -5580,7 +5580,7 @@
                   <a:srgbClr val="000000"/>
                 </a:solidFill>
               </a:rPr>
-              <a:t>kolega</a:t>
+              <a:t>17%</a:t>
             </a:r>
           </a:p>
         </p:txBody>
@@ -5613,7 +5613,41 @@
                   <a:srgbClr val="000000"/>
                 </a:solidFill>
               </a:rPr>
-              <a:t>~512 MB+</a:t>
+              <a:t>~1.2 GB</a:t>
+            </a:r>
+          </a:p>
+        </p:txBody>
+      </p:sp>
+      <p:sp>
+        <p:nvSpPr>
+          <p:cNvPr id="33" name="TextBox 32"/>
+          <p:cNvSpPr txBox="1"/>
+          <p:nvPr/>
+        </p:nvSpPr>
+        <p:spPr>
+          <a:xfrm>
+            <a:off x="274320" y="3730752"/>
+            <a:ext cx="8412480" cy="548640"/>
+          </a:xfrm>
+          <a:prstGeom prst="rect">
+            <a:avLst/>
+          </a:prstGeom>
+          <a:noFill/>
+        </p:spPr>
+        <p:txBody>
+          <a:bodyPr wrap="square">
+            <a:spAutoFit/>
+          </a:bodyPr>
+          <a:lstStyle/>
+          <a:p>
+            <a:pPr algn="l"/>
+            <a:r>
+              <a:rPr sz="800" b="0">
+                <a:solidFill>
+                  <a:srgbClr val="666666"/>
+                </a:solidFill>
+              </a:rPr>
+              <a:t>* p95 latencija merena u Scenariju D (acks=1, RF=1) — acks nivo ne menja trenutak upisa poruke u broker log, vec samo producer-side confirmation (utice na throughput/loss, vidi Scenario A).</a:t>
             </a:r>
           </a:p>
         </p:txBody>

--- a/mqtt/presentation/prezentacija.pptx
+++ b/mqtt/presentation/prezentacija.pptx
@@ -5,19 +5,19 @@
     <p:sldMasterId id="2147483648" r:id="rId1"/>
   </p:sldMasterIdLst>
   <p:sldIdLst>
-    <p:sldId id="256" r:id="rId7"/>
-    <p:sldId id="257" r:id="rId8"/>
-    <p:sldId id="258" r:id="rId9"/>
-    <p:sldId id="259" r:id="rId10"/>
-    <p:sldId id="260" r:id="rId11"/>
-    <p:sldId id="261" r:id="rId12"/>
-    <p:sldId id="262" r:id="rId13"/>
-    <p:sldId id="263" r:id="rId14"/>
-    <p:sldId id="264" r:id="rId15"/>
-    <p:sldId id="265" r:id="rId16"/>
-    <p:sldId id="266" r:id="rId17"/>
+    <p:sldId id="256" r:id="rId2"/>
+    <p:sldId id="257" r:id="rId3"/>
+    <p:sldId id="258" r:id="rId4"/>
+    <p:sldId id="260" r:id="rId5"/>
+    <p:sldId id="259" r:id="rId6"/>
+    <p:sldId id="261" r:id="rId7"/>
+    <p:sldId id="262" r:id="rId8"/>
+    <p:sldId id="263" r:id="rId9"/>
+    <p:sldId id="264" r:id="rId10"/>
+    <p:sldId id="265" r:id="rId11"/>
+    <p:sldId id="266" r:id="rId12"/>
   </p:sldIdLst>
-  <p:sldSz cx="9144000" cy="5143500" type="screen4x3"/>
+  <p:sldSz cx="9144000" cy="5143500" type="screen16x9"/>
   <p:notesSz cx="6858000" cy="9144000"/>
   <p:defaultTextStyle>
     <a:defPPr>
@@ -114,6 +114,22 @@
       </a:defRPr>
     </a:lvl9pPr>
   </p:defaultTextStyle>
+  <p:extLst>
+    <p:ext uri="{EFAFB233-063F-42B5-8137-9DF3F51BA10A}">
+      <p15:sldGuideLst xmlns:p15="http://schemas.microsoft.com/office/powerpoint/2012/main">
+        <p15:guide id="1" orient="horz" pos="2160">
+          <p15:clr>
+            <a:srgbClr val="A4A3A4"/>
+          </p15:clr>
+        </p15:guide>
+        <p15:guide id="2" pos="2880">
+          <p15:clr>
+            <a:srgbClr val="A4A3A4"/>
+          </p15:clr>
+        </p15:guide>
+      </p15:sldGuideLst>
+    </p:ext>
+  </p:extLst>
 </p:presentation>
 </file>
 
@@ -155,10 +171,9 @@
           <a:lstStyle/>
           <a:p>
             <a:r>
-              <a:rPr lang="en-US" smtClean="0"/>
+              <a:rPr lang="en-US"/>
               <a:t>Click to edit Master title style</a:t>
             </a:r>
-            <a:endParaRPr lang="en-US"/>
           </a:p>
         </p:txBody>
       </p:sp>
@@ -274,10 +289,9 @@
           </a:lstStyle>
           <a:p>
             <a:r>
-              <a:rPr lang="en-US" smtClean="0"/>
+              <a:rPr lang="en-US"/>
               <a:t>Click to edit Master subtitle style</a:t>
             </a:r>
-            <a:endParaRPr lang="en-US"/>
           </a:p>
         </p:txBody>
       </p:sp>
@@ -298,7 +312,7 @@
           <a:p>
             <a:fld id="{5BCAD085-E8A6-8845-BD4E-CB4CCA059FC4}" type="datetimeFigureOut">
               <a:rPr lang="en-US" smtClean="0"/>
-              <a:t>1/27/13</a:t>
+              <a:t>6/15/26</a:t>
             </a:fld>
             <a:endParaRPr lang="en-US"/>
           </a:p>
@@ -392,10 +406,9 @@
           <a:lstStyle/>
           <a:p>
             <a:r>
-              <a:rPr lang="en-US" smtClean="0"/>
+              <a:rPr lang="en-US"/>
               <a:t>Click to edit Master title style</a:t>
             </a:r>
-            <a:endParaRPr lang="en-US"/>
           </a:p>
         </p:txBody>
       </p:sp>
@@ -416,38 +429,37 @@
           <a:p>
             <a:pPr lvl="0"/>
             <a:r>
-              <a:rPr lang="en-US" smtClean="0"/>
+              <a:rPr lang="en-US"/>
               <a:t>Click to edit Master text styles</a:t>
             </a:r>
           </a:p>
           <a:p>
             <a:pPr lvl="1"/>
             <a:r>
-              <a:rPr lang="en-US" smtClean="0"/>
+              <a:rPr lang="en-US"/>
               <a:t>Second level</a:t>
             </a:r>
           </a:p>
           <a:p>
             <a:pPr lvl="2"/>
             <a:r>
-              <a:rPr lang="en-US" smtClean="0"/>
+              <a:rPr lang="en-US"/>
               <a:t>Third level</a:t>
             </a:r>
           </a:p>
           <a:p>
             <a:pPr lvl="3"/>
             <a:r>
-              <a:rPr lang="en-US" smtClean="0"/>
+              <a:rPr lang="en-US"/>
               <a:t>Fourth level</a:t>
             </a:r>
           </a:p>
           <a:p>
             <a:pPr lvl="4"/>
             <a:r>
-              <a:rPr lang="en-US" smtClean="0"/>
+              <a:rPr lang="en-US"/>
               <a:t>Fifth level</a:t>
             </a:r>
-            <a:endParaRPr lang="en-US"/>
           </a:p>
         </p:txBody>
       </p:sp>
@@ -468,7 +480,7 @@
           <a:p>
             <a:fld id="{5BCAD085-E8A6-8845-BD4E-CB4CCA059FC4}" type="datetimeFigureOut">
               <a:rPr lang="en-US" smtClean="0"/>
-              <a:t>1/27/13</a:t>
+              <a:t>6/15/26</a:t>
             </a:fld>
             <a:endParaRPr lang="en-US"/>
           </a:p>
@@ -567,10 +579,9 @@
           <a:lstStyle/>
           <a:p>
             <a:r>
-              <a:rPr lang="en-US" smtClean="0"/>
+              <a:rPr lang="en-US"/>
               <a:t>Click to edit Master title style</a:t>
             </a:r>
-            <a:endParaRPr lang="en-US"/>
           </a:p>
         </p:txBody>
       </p:sp>
@@ -596,38 +607,37 @@
           <a:p>
             <a:pPr lvl="0"/>
             <a:r>
-              <a:rPr lang="en-US" smtClean="0"/>
+              <a:rPr lang="en-US"/>
               <a:t>Click to edit Master text styles</a:t>
             </a:r>
           </a:p>
           <a:p>
             <a:pPr lvl="1"/>
             <a:r>
-              <a:rPr lang="en-US" smtClean="0"/>
+              <a:rPr lang="en-US"/>
               <a:t>Second level</a:t>
             </a:r>
           </a:p>
           <a:p>
             <a:pPr lvl="2"/>
             <a:r>
-              <a:rPr lang="en-US" smtClean="0"/>
+              <a:rPr lang="en-US"/>
               <a:t>Third level</a:t>
             </a:r>
           </a:p>
           <a:p>
             <a:pPr lvl="3"/>
             <a:r>
-              <a:rPr lang="en-US" smtClean="0"/>
+              <a:rPr lang="en-US"/>
               <a:t>Fourth level</a:t>
             </a:r>
           </a:p>
           <a:p>
             <a:pPr lvl="4"/>
             <a:r>
-              <a:rPr lang="en-US" smtClean="0"/>
+              <a:rPr lang="en-US"/>
               <a:t>Fifth level</a:t>
             </a:r>
-            <a:endParaRPr lang="en-US"/>
           </a:p>
         </p:txBody>
       </p:sp>
@@ -648,7 +658,7 @@
           <a:p>
             <a:fld id="{5BCAD085-E8A6-8845-BD4E-CB4CCA059FC4}" type="datetimeFigureOut">
               <a:rPr lang="en-US" smtClean="0"/>
-              <a:t>1/27/13</a:t>
+              <a:t>6/15/26</a:t>
             </a:fld>
             <a:endParaRPr lang="en-US"/>
           </a:p>
@@ -742,10 +752,9 @@
           <a:lstStyle/>
           <a:p>
             <a:r>
-              <a:rPr lang="en-US" smtClean="0"/>
+              <a:rPr lang="en-US"/>
               <a:t>Click to edit Master title style</a:t>
             </a:r>
-            <a:endParaRPr lang="en-US"/>
           </a:p>
         </p:txBody>
       </p:sp>
@@ -766,38 +775,37 @@
           <a:p>
             <a:pPr lvl="0"/>
             <a:r>
-              <a:rPr lang="en-US" smtClean="0"/>
+              <a:rPr lang="en-US"/>
               <a:t>Click to edit Master text styles</a:t>
             </a:r>
           </a:p>
           <a:p>
             <a:pPr lvl="1"/>
             <a:r>
-              <a:rPr lang="en-US" smtClean="0"/>
+              <a:rPr lang="en-US"/>
               <a:t>Second level</a:t>
             </a:r>
           </a:p>
           <a:p>
             <a:pPr lvl="2"/>
             <a:r>
-              <a:rPr lang="en-US" smtClean="0"/>
+              <a:rPr lang="en-US"/>
               <a:t>Third level</a:t>
             </a:r>
           </a:p>
           <a:p>
             <a:pPr lvl="3"/>
             <a:r>
-              <a:rPr lang="en-US" smtClean="0"/>
+              <a:rPr lang="en-US"/>
               <a:t>Fourth level</a:t>
             </a:r>
           </a:p>
           <a:p>
             <a:pPr lvl="4"/>
             <a:r>
-              <a:rPr lang="en-US" smtClean="0"/>
+              <a:rPr lang="en-US"/>
               <a:t>Fifth level</a:t>
             </a:r>
-            <a:endParaRPr lang="en-US"/>
           </a:p>
         </p:txBody>
       </p:sp>
@@ -818,7 +826,7 @@
           <a:p>
             <a:fld id="{5BCAD085-E8A6-8845-BD4E-CB4CCA059FC4}" type="datetimeFigureOut">
               <a:rPr lang="en-US" smtClean="0"/>
-              <a:t>1/27/13</a:t>
+              <a:t>6/15/26</a:t>
             </a:fld>
             <a:endParaRPr lang="en-US"/>
           </a:p>
@@ -921,10 +929,9 @@
           </a:lstStyle>
           <a:p>
             <a:r>
-              <a:rPr lang="en-US" smtClean="0"/>
+              <a:rPr lang="en-US"/>
               <a:t>Click to edit Master title style</a:t>
             </a:r>
-            <a:endParaRPr lang="en-US"/>
           </a:p>
         </p:txBody>
       </p:sp>
@@ -1041,7 +1048,7 @@
           <a:p>
             <a:pPr lvl="0"/>
             <a:r>
-              <a:rPr lang="en-US" smtClean="0"/>
+              <a:rPr lang="en-US"/>
               <a:t>Click to edit Master text styles</a:t>
             </a:r>
           </a:p>
@@ -1064,7 +1071,7 @@
           <a:p>
             <a:fld id="{5BCAD085-E8A6-8845-BD4E-CB4CCA059FC4}" type="datetimeFigureOut">
               <a:rPr lang="en-US" smtClean="0"/>
-              <a:t>1/27/13</a:t>
+              <a:t>6/15/26</a:t>
             </a:fld>
             <a:endParaRPr lang="en-US"/>
           </a:p>
@@ -1158,10 +1165,9 @@
           <a:lstStyle/>
           <a:p>
             <a:r>
-              <a:rPr lang="en-US" smtClean="0"/>
+              <a:rPr lang="en-US"/>
               <a:t>Click to edit Master title style</a:t>
             </a:r>
-            <a:endParaRPr lang="en-US"/>
           </a:p>
         </p:txBody>
       </p:sp>
@@ -1215,38 +1221,37 @@
           <a:p>
             <a:pPr lvl="0"/>
             <a:r>
-              <a:rPr lang="en-US" smtClean="0"/>
+              <a:rPr lang="en-US"/>
               <a:t>Click to edit Master text styles</a:t>
             </a:r>
           </a:p>
           <a:p>
             <a:pPr lvl="1"/>
             <a:r>
-              <a:rPr lang="en-US" smtClean="0"/>
+              <a:rPr lang="en-US"/>
               <a:t>Second level</a:t>
             </a:r>
           </a:p>
           <a:p>
             <a:pPr lvl="2"/>
             <a:r>
-              <a:rPr lang="en-US" smtClean="0"/>
+              <a:rPr lang="en-US"/>
               <a:t>Third level</a:t>
             </a:r>
           </a:p>
           <a:p>
             <a:pPr lvl="3"/>
             <a:r>
-              <a:rPr lang="en-US" smtClean="0"/>
+              <a:rPr lang="en-US"/>
               <a:t>Fourth level</a:t>
             </a:r>
           </a:p>
           <a:p>
             <a:pPr lvl="4"/>
             <a:r>
-              <a:rPr lang="en-US" smtClean="0"/>
+              <a:rPr lang="en-US"/>
               <a:t>Fifth level</a:t>
             </a:r>
-            <a:endParaRPr lang="en-US"/>
           </a:p>
         </p:txBody>
       </p:sp>
@@ -1300,38 +1305,37 @@
           <a:p>
             <a:pPr lvl="0"/>
             <a:r>
-              <a:rPr lang="en-US" smtClean="0"/>
+              <a:rPr lang="en-US"/>
               <a:t>Click to edit Master text styles</a:t>
             </a:r>
           </a:p>
           <a:p>
             <a:pPr lvl="1"/>
             <a:r>
-              <a:rPr lang="en-US" smtClean="0"/>
+              <a:rPr lang="en-US"/>
               <a:t>Second level</a:t>
             </a:r>
           </a:p>
           <a:p>
             <a:pPr lvl="2"/>
             <a:r>
-              <a:rPr lang="en-US" smtClean="0"/>
+              <a:rPr lang="en-US"/>
               <a:t>Third level</a:t>
             </a:r>
           </a:p>
           <a:p>
             <a:pPr lvl="3"/>
             <a:r>
-              <a:rPr lang="en-US" smtClean="0"/>
+              <a:rPr lang="en-US"/>
               <a:t>Fourth level</a:t>
             </a:r>
           </a:p>
           <a:p>
             <a:pPr lvl="4"/>
             <a:r>
-              <a:rPr lang="en-US" smtClean="0"/>
+              <a:rPr lang="en-US"/>
               <a:t>Fifth level</a:t>
             </a:r>
-            <a:endParaRPr lang="en-US"/>
           </a:p>
         </p:txBody>
       </p:sp>
@@ -1352,7 +1356,7 @@
           <a:p>
             <a:fld id="{5BCAD085-E8A6-8845-BD4E-CB4CCA059FC4}" type="datetimeFigureOut">
               <a:rPr lang="en-US" smtClean="0"/>
-              <a:t>1/27/13</a:t>
+              <a:t>6/15/26</a:t>
             </a:fld>
             <a:endParaRPr lang="en-US"/>
           </a:p>
@@ -1450,10 +1454,9 @@
           </a:lstStyle>
           <a:p>
             <a:r>
-              <a:rPr lang="en-US" smtClean="0"/>
+              <a:rPr lang="en-US"/>
               <a:t>Click to edit Master title style</a:t>
             </a:r>
-            <a:endParaRPr lang="en-US"/>
           </a:p>
         </p:txBody>
       </p:sp>
@@ -1516,7 +1519,7 @@
           <a:p>
             <a:pPr lvl="0"/>
             <a:r>
-              <a:rPr lang="en-US" smtClean="0"/>
+              <a:rPr lang="en-US"/>
               <a:t>Click to edit Master text styles</a:t>
             </a:r>
           </a:p>
@@ -1572,38 +1575,37 @@
           <a:p>
             <a:pPr lvl="0"/>
             <a:r>
-              <a:rPr lang="en-US" smtClean="0"/>
+              <a:rPr lang="en-US"/>
               <a:t>Click to edit Master text styles</a:t>
             </a:r>
           </a:p>
           <a:p>
             <a:pPr lvl="1"/>
             <a:r>
-              <a:rPr lang="en-US" smtClean="0"/>
+              <a:rPr lang="en-US"/>
               <a:t>Second level</a:t>
             </a:r>
           </a:p>
           <a:p>
             <a:pPr lvl="2"/>
             <a:r>
-              <a:rPr lang="en-US" smtClean="0"/>
+              <a:rPr lang="en-US"/>
               <a:t>Third level</a:t>
             </a:r>
           </a:p>
           <a:p>
             <a:pPr lvl="3"/>
             <a:r>
-              <a:rPr lang="en-US" smtClean="0"/>
+              <a:rPr lang="en-US"/>
               <a:t>Fourth level</a:t>
             </a:r>
           </a:p>
           <a:p>
             <a:pPr lvl="4"/>
             <a:r>
-              <a:rPr lang="en-US" smtClean="0"/>
+              <a:rPr lang="en-US"/>
               <a:t>Fifth level</a:t>
             </a:r>
-            <a:endParaRPr lang="en-US"/>
           </a:p>
         </p:txBody>
       </p:sp>
@@ -1666,7 +1668,7 @@
           <a:p>
             <a:pPr lvl="0"/>
             <a:r>
-              <a:rPr lang="en-US" smtClean="0"/>
+              <a:rPr lang="en-US"/>
               <a:t>Click to edit Master text styles</a:t>
             </a:r>
           </a:p>
@@ -1722,38 +1724,37 @@
           <a:p>
             <a:pPr lvl="0"/>
             <a:r>
-              <a:rPr lang="en-US" smtClean="0"/>
+              <a:rPr lang="en-US"/>
               <a:t>Click to edit Master text styles</a:t>
             </a:r>
           </a:p>
           <a:p>
             <a:pPr lvl="1"/>
             <a:r>
-              <a:rPr lang="en-US" smtClean="0"/>
+              <a:rPr lang="en-US"/>
               <a:t>Second level</a:t>
             </a:r>
           </a:p>
           <a:p>
             <a:pPr lvl="2"/>
             <a:r>
-              <a:rPr lang="en-US" smtClean="0"/>
+              <a:rPr lang="en-US"/>
               <a:t>Third level</a:t>
             </a:r>
           </a:p>
           <a:p>
             <a:pPr lvl="3"/>
             <a:r>
-              <a:rPr lang="en-US" smtClean="0"/>
+              <a:rPr lang="en-US"/>
               <a:t>Fourth level</a:t>
             </a:r>
           </a:p>
           <a:p>
             <a:pPr lvl="4"/>
             <a:r>
-              <a:rPr lang="en-US" smtClean="0"/>
+              <a:rPr lang="en-US"/>
               <a:t>Fifth level</a:t>
             </a:r>
-            <a:endParaRPr lang="en-US"/>
           </a:p>
         </p:txBody>
       </p:sp>
@@ -1774,7 +1775,7 @@
           <a:p>
             <a:fld id="{5BCAD085-E8A6-8845-BD4E-CB4CCA059FC4}" type="datetimeFigureOut">
               <a:rPr lang="en-US" smtClean="0"/>
-              <a:t>1/27/13</a:t>
+              <a:t>6/15/26</a:t>
             </a:fld>
             <a:endParaRPr lang="en-US"/>
           </a:p>
@@ -1868,10 +1869,9 @@
           <a:lstStyle/>
           <a:p>
             <a:r>
-              <a:rPr lang="en-US" smtClean="0"/>
+              <a:rPr lang="en-US"/>
               <a:t>Click to edit Master title style</a:t>
             </a:r>
-            <a:endParaRPr lang="en-US"/>
           </a:p>
         </p:txBody>
       </p:sp>
@@ -1892,7 +1892,7 @@
           <a:p>
             <a:fld id="{5BCAD085-E8A6-8845-BD4E-CB4CCA059FC4}" type="datetimeFigureOut">
               <a:rPr lang="en-US" smtClean="0"/>
-              <a:t>1/27/13</a:t>
+              <a:t>6/15/26</a:t>
             </a:fld>
             <a:endParaRPr lang="en-US"/>
           </a:p>
@@ -1987,7 +1987,7 @@
           <a:p>
             <a:fld id="{5BCAD085-E8A6-8845-BD4E-CB4CCA059FC4}" type="datetimeFigureOut">
               <a:rPr lang="en-US" smtClean="0"/>
-              <a:t>1/27/13</a:t>
+              <a:t>6/15/26</a:t>
             </a:fld>
             <a:endParaRPr lang="en-US"/>
           </a:p>
@@ -2090,10 +2090,9 @@
           </a:lstStyle>
           <a:p>
             <a:r>
-              <a:rPr lang="en-US" smtClean="0"/>
+              <a:rPr lang="en-US"/>
               <a:t>Click to edit Master title style</a:t>
             </a:r>
-            <a:endParaRPr lang="en-US"/>
           </a:p>
         </p:txBody>
       </p:sp>
@@ -2147,38 +2146,37 @@
           <a:p>
             <a:pPr lvl="0"/>
             <a:r>
-              <a:rPr lang="en-US" smtClean="0"/>
+              <a:rPr lang="en-US"/>
               <a:t>Click to edit Master text styles</a:t>
             </a:r>
           </a:p>
           <a:p>
             <a:pPr lvl="1"/>
             <a:r>
-              <a:rPr lang="en-US" smtClean="0"/>
+              <a:rPr lang="en-US"/>
               <a:t>Second level</a:t>
             </a:r>
           </a:p>
           <a:p>
             <a:pPr lvl="2"/>
             <a:r>
-              <a:rPr lang="en-US" smtClean="0"/>
+              <a:rPr lang="en-US"/>
               <a:t>Third level</a:t>
             </a:r>
           </a:p>
           <a:p>
             <a:pPr lvl="3"/>
             <a:r>
-              <a:rPr lang="en-US" smtClean="0"/>
+              <a:rPr lang="en-US"/>
               <a:t>Fourth level</a:t>
             </a:r>
           </a:p>
           <a:p>
             <a:pPr lvl="4"/>
             <a:r>
-              <a:rPr lang="en-US" smtClean="0"/>
+              <a:rPr lang="en-US"/>
               <a:t>Fifth level</a:t>
             </a:r>
-            <a:endParaRPr lang="en-US"/>
           </a:p>
         </p:txBody>
       </p:sp>
@@ -2241,7 +2239,7 @@
           <a:p>
             <a:pPr lvl="0"/>
             <a:r>
-              <a:rPr lang="en-US" smtClean="0"/>
+              <a:rPr lang="en-US"/>
               <a:t>Click to edit Master text styles</a:t>
             </a:r>
           </a:p>
@@ -2264,7 +2262,7 @@
           <a:p>
             <a:fld id="{5BCAD085-E8A6-8845-BD4E-CB4CCA059FC4}" type="datetimeFigureOut">
               <a:rPr lang="en-US" smtClean="0"/>
-              <a:t>1/27/13</a:t>
+              <a:t>6/15/26</a:t>
             </a:fld>
             <a:endParaRPr lang="en-US"/>
           </a:p>
@@ -2367,10 +2365,9 @@
           </a:lstStyle>
           <a:p>
             <a:r>
-              <a:rPr lang="en-US" smtClean="0"/>
+              <a:rPr lang="en-US"/>
               <a:t>Click to edit Master title style</a:t>
             </a:r>
-            <a:endParaRPr lang="en-US"/>
           </a:p>
         </p:txBody>
       </p:sp>
@@ -2494,7 +2491,7 @@
           <a:p>
             <a:pPr lvl="0"/>
             <a:r>
-              <a:rPr lang="en-US" smtClean="0"/>
+              <a:rPr lang="en-US"/>
               <a:t>Click to edit Master text styles</a:t>
             </a:r>
           </a:p>
@@ -2517,7 +2514,7 @@
           <a:p>
             <a:fld id="{5BCAD085-E8A6-8845-BD4E-CB4CCA059FC4}" type="datetimeFigureOut">
               <a:rPr lang="en-US" smtClean="0"/>
-              <a:t>1/27/13</a:t>
+              <a:t>6/15/26</a:t>
             </a:fld>
             <a:endParaRPr lang="en-US"/>
           </a:p>
@@ -2626,10 +2623,9 @@
           <a:lstStyle/>
           <a:p>
             <a:r>
-              <a:rPr lang="en-US" smtClean="0"/>
+              <a:rPr lang="en-US"/>
               <a:t>Click to edit Master title style</a:t>
             </a:r>
-            <a:endParaRPr lang="en-US"/>
           </a:p>
         </p:txBody>
       </p:sp>
@@ -2660,38 +2656,37 @@
           <a:p>
             <a:pPr lvl="0"/>
             <a:r>
-              <a:rPr lang="en-US" smtClean="0"/>
+              <a:rPr lang="en-US"/>
               <a:t>Click to edit Master text styles</a:t>
             </a:r>
           </a:p>
           <a:p>
             <a:pPr lvl="1"/>
             <a:r>
-              <a:rPr lang="en-US" smtClean="0"/>
+              <a:rPr lang="en-US"/>
               <a:t>Second level</a:t>
             </a:r>
           </a:p>
           <a:p>
             <a:pPr lvl="2"/>
             <a:r>
-              <a:rPr lang="en-US" smtClean="0"/>
+              <a:rPr lang="en-US"/>
               <a:t>Third level</a:t>
             </a:r>
           </a:p>
           <a:p>
             <a:pPr lvl="3"/>
             <a:r>
-              <a:rPr lang="en-US" smtClean="0"/>
+              <a:rPr lang="en-US"/>
               <a:t>Fourth level</a:t>
             </a:r>
           </a:p>
           <a:p>
             <a:pPr lvl="4"/>
             <a:r>
-              <a:rPr lang="en-US" smtClean="0"/>
+              <a:rPr lang="en-US"/>
               <a:t>Fifth level</a:t>
             </a:r>
-            <a:endParaRPr lang="en-US"/>
           </a:p>
         </p:txBody>
       </p:sp>
@@ -2730,7 +2725,7 @@
           <a:p>
             <a:fld id="{5BCAD085-E8A6-8845-BD4E-CB4CCA059FC4}" type="datetimeFigureOut">
               <a:rPr lang="en-US" smtClean="0"/>
-              <a:t>1/27/13</a:t>
+              <a:t>6/15/26</a:t>
             </a:fld>
             <a:endParaRPr lang="en-US"/>
           </a:p>
@@ -3089,7 +3084,7 @@
 </file>
 
 <file path=ppt/slides/slide1.xml><?xml version="1.0" encoding="utf-8"?>
-<p:sld xmlns:a="http://schemas.openxmlformats.org/drawingml/2006/main" xmlns:p="http://schemas.openxmlformats.org/presentationml/2006/main" xmlns:r="http://schemas.openxmlformats.org/officeDocument/2006/relationships">
+<p:sld xmlns:a="http://schemas.openxmlformats.org/drawingml/2006/main" xmlns:r="http://schemas.openxmlformats.org/officeDocument/2006/relationships" xmlns:p="http://schemas.openxmlformats.org/presentationml/2006/main">
   <p:cSld>
     <p:bg>
       <p:bgPr>
@@ -3105,7 +3100,14 @@
         <p:cNvGrpSpPr/>
         <p:nvPr/>
       </p:nvGrpSpPr>
-      <p:grpSpPr/>
+      <p:grpSpPr>
+        <a:xfrm>
+          <a:off x="0" y="0"/>
+          <a:ext cx="0" cy="0"/>
+          <a:chOff x="0" y="0"/>
+          <a:chExt cx="0" cy="0"/>
+        </a:xfrm>
+      </p:grpSpPr>
       <p:sp>
         <p:nvSpPr>
           <p:cNvPr id="2" name="TextBox 1"/>
@@ -3217,7 +3219,7 @@
 </file>
 
 <file path=ppt/slides/slide10.xml><?xml version="1.0" encoding="utf-8"?>
-<p:sld xmlns:a="http://schemas.openxmlformats.org/drawingml/2006/main" xmlns:p="http://schemas.openxmlformats.org/presentationml/2006/main" xmlns:r="http://schemas.openxmlformats.org/officeDocument/2006/relationships">
+<p:sld xmlns:a="http://schemas.openxmlformats.org/drawingml/2006/main" xmlns:r="http://schemas.openxmlformats.org/officeDocument/2006/relationships" xmlns:p="http://schemas.openxmlformats.org/presentationml/2006/main">
   <p:cSld>
     <p:bg>
       <p:bgPr>
@@ -3233,7 +3235,14 @@
         <p:cNvGrpSpPr/>
         <p:nvPr/>
       </p:nvGrpSpPr>
-      <p:grpSpPr/>
+      <p:grpSpPr>
+        <a:xfrm>
+          <a:off x="0" y="0"/>
+          <a:ext cx="0" cy="0"/>
+          <a:chOff x="0" y="0"/>
+          <a:chExt cx="0" cy="0"/>
+        </a:xfrm>
+      </p:grpSpPr>
       <p:sp>
         <p:nvSpPr>
           <p:cNvPr id="2" name="TextBox 1"/>
@@ -3684,7 +3693,7 @@
 </file>
 
 <file path=ppt/slides/slide11.xml><?xml version="1.0" encoding="utf-8"?>
-<p:sld xmlns:a="http://schemas.openxmlformats.org/drawingml/2006/main" xmlns:p="http://schemas.openxmlformats.org/presentationml/2006/main" xmlns:r="http://schemas.openxmlformats.org/officeDocument/2006/relationships">
+<p:sld xmlns:a="http://schemas.openxmlformats.org/drawingml/2006/main" xmlns:r="http://schemas.openxmlformats.org/officeDocument/2006/relationships" xmlns:p="http://schemas.openxmlformats.org/presentationml/2006/main">
   <p:cSld>
     <p:bg>
       <p:bgPr>
@@ -3700,7 +3709,14 @@
         <p:cNvGrpSpPr/>
         <p:nvPr/>
       </p:nvGrpSpPr>
-      <p:grpSpPr/>
+      <p:grpSpPr>
+        <a:xfrm>
+          <a:off x="0" y="0"/>
+          <a:ext cx="0" cy="0"/>
+          <a:chOff x="0" y="0"/>
+          <a:chExt cx="0" cy="0"/>
+        </a:xfrm>
+      </p:grpSpPr>
       <p:sp>
         <p:nvSpPr>
           <p:cNvPr id="2" name="TextBox 1"/>
@@ -3981,7 +3997,7 @@
 </file>
 
 <file path=ppt/slides/slide2.xml><?xml version="1.0" encoding="utf-8"?>
-<p:sld xmlns:a="http://schemas.openxmlformats.org/drawingml/2006/main" xmlns:p="http://schemas.openxmlformats.org/presentationml/2006/main" xmlns:r="http://schemas.openxmlformats.org/officeDocument/2006/relationships">
+<p:sld xmlns:a="http://schemas.openxmlformats.org/drawingml/2006/main" xmlns:r="http://schemas.openxmlformats.org/officeDocument/2006/relationships" xmlns:p="http://schemas.openxmlformats.org/presentationml/2006/main">
   <p:cSld>
     <p:bg>
       <p:bgPr>
@@ -3997,7 +4013,14 @@
         <p:cNvGrpSpPr/>
         <p:nvPr/>
       </p:nvGrpSpPr>
-      <p:grpSpPr/>
+      <p:grpSpPr>
+        <a:xfrm>
+          <a:off x="0" y="0"/>
+          <a:ext cx="0" cy="0"/>
+          <a:chOff x="0" y="0"/>
+          <a:chExt cx="0" cy="0"/>
+        </a:xfrm>
+      </p:grpSpPr>
       <p:sp>
         <p:nvSpPr>
           <p:cNvPr id="2" name="TextBox 1"/>
@@ -4083,23 +4106,30 @@
             </a:r>
           </a:p>
           <a:p>
+            <a:endParaRPr sz="1100">
+              <a:solidFill>
+                <a:srgbClr val="000000"/>
+              </a:solidFill>
+            </a:endParaRPr>
+          </a:p>
+          <a:p>
+            <a:r>
+              <a:rPr sz="1100" b="1">
+                <a:solidFill>
+                  <a:srgbClr val="000000"/>
+                </a:solidFill>
+              </a:rPr>
+              <a:t>Kafka strana (.NET Core)</a:t>
+            </a:r>
+          </a:p>
+          <a:p>
             <a:r>
               <a:rPr sz="1100">
                 <a:solidFill>
                   <a:srgbClr val="000000"/>
                 </a:solidFill>
               </a:rPr>
-              <a:t/>
-            </a:r>
-          </a:p>
-          <a:p>
-            <a:r>
-              <a:rPr sz="1100" b="1">
-                <a:solidFill>
-                  <a:srgbClr val="000000"/>
-                </a:solidFill>
-              </a:rPr>
-              <a:t>Kafka strana (.NET Core)</a:t>
+              <a:t>  Ingestion Service  →  Kafka KRaft      →  Storage Service  →  PostgreSQL</a:t>
             </a:r>
           </a:p>
           <a:p>
@@ -4109,28 +4139,15 @@
                   <a:srgbClr val="000000"/>
                 </a:solidFill>
               </a:rPr>
-              <a:t>  Ingestion Service  →  Kafka KRaft      →  Storage Service  →  PostgreSQL</a:t>
-            </a:r>
-          </a:p>
-          <a:p>
-            <a:r>
-              <a:rPr sz="1100">
-                <a:solidFill>
-                  <a:srgbClr val="000000"/>
-                </a:solidFill>
-              </a:rPr>
               <a:t>                                          →  Analytics Service</a:t>
             </a:r>
           </a:p>
           <a:p>
-            <a:r>
-              <a:rPr sz="1100">
-                <a:solidFill>
-                  <a:srgbClr val="000000"/>
-                </a:solidFill>
-              </a:rPr>
-              <a:t/>
-            </a:r>
+            <a:endParaRPr sz="1100">
+              <a:solidFill>
+                <a:srgbClr val="000000"/>
+              </a:solidFill>
+            </a:endParaRPr>
           </a:p>
           <a:p>
             <a:r>
@@ -4163,7 +4180,7 @@
 </file>
 
 <file path=ppt/slides/slide3.xml><?xml version="1.0" encoding="utf-8"?>
-<p:sld xmlns:a="http://schemas.openxmlformats.org/drawingml/2006/main" xmlns:p="http://schemas.openxmlformats.org/presentationml/2006/main" xmlns:r="http://schemas.openxmlformats.org/officeDocument/2006/relationships">
+<p:sld xmlns:a="http://schemas.openxmlformats.org/drawingml/2006/main" xmlns:r="http://schemas.openxmlformats.org/officeDocument/2006/relationships" xmlns:p="http://schemas.openxmlformats.org/presentationml/2006/main">
   <p:cSld>
     <p:bg>
       <p:bgPr>
@@ -4179,7 +4196,14 @@
         <p:cNvGrpSpPr/>
         <p:nvPr/>
       </p:nvGrpSpPr>
-      <p:grpSpPr/>
+      <p:grpSpPr>
+        <a:xfrm>
+          <a:off x="0" y="0"/>
+          <a:ext cx="0" cy="0"/>
+          <a:chOff x="0" y="0"/>
+          <a:chExt cx="0" cy="0"/>
+        </a:xfrm>
+      </p:grpSpPr>
       <p:sp>
         <p:nvSpPr>
           <p:cNvPr id="2" name="TextBox 1"/>
@@ -4246,7 +4270,7 @@
 </file>
 
 <file path=ppt/slides/slide4.xml><?xml version="1.0" encoding="utf-8"?>
-<p:sld xmlns:a="http://schemas.openxmlformats.org/drawingml/2006/main" xmlns:p="http://schemas.openxmlformats.org/presentationml/2006/main" xmlns:r="http://schemas.openxmlformats.org/officeDocument/2006/relationships">
+<p:sld xmlns:a="http://schemas.openxmlformats.org/drawingml/2006/main" xmlns:r="http://schemas.openxmlformats.org/officeDocument/2006/relationships" xmlns:p="http://schemas.openxmlformats.org/presentationml/2006/main">
   <p:cSld>
     <p:bg>
       <p:bgPr>
@@ -4262,7 +4286,14 @@
         <p:cNvGrpSpPr/>
         <p:nvPr/>
       </p:nvGrpSpPr>
-      <p:grpSpPr/>
+      <p:grpSpPr>
+        <a:xfrm>
+          <a:off x="0" y="0"/>
+          <a:ext cx="0" cy="0"/>
+          <a:chOff x="0" y="0"/>
+          <a:chExt cx="0" cy="0"/>
+        </a:xfrm>
+      </p:grpSpPr>
       <p:sp>
         <p:nvSpPr>
           <p:cNvPr id="2" name="TextBox 1"/>
@@ -4291,7 +4322,7 @@
                   <a:srgbClr val="000000"/>
                 </a:solidFill>
               </a:rPr>
-              <a:t>Scenario C — Nagli porast opterecenja (Burst Load)</a:t>
+              <a:t>Scenario B — Pad mreze i automatski oporavak</a:t>
             </a:r>
           </a:p>
         </p:txBody>
@@ -4329,7 +4360,7 @@
 </file>
 
 <file path=ppt/slides/slide5.xml><?xml version="1.0" encoding="utf-8"?>
-<p:sld xmlns:a="http://schemas.openxmlformats.org/drawingml/2006/main" xmlns:p="http://schemas.openxmlformats.org/presentationml/2006/main" xmlns:r="http://schemas.openxmlformats.org/officeDocument/2006/relationships">
+<p:sld xmlns:a="http://schemas.openxmlformats.org/drawingml/2006/main" xmlns:r="http://schemas.openxmlformats.org/officeDocument/2006/relationships" xmlns:p="http://schemas.openxmlformats.org/presentationml/2006/main">
   <p:cSld>
     <p:bg>
       <p:bgPr>
@@ -4345,7 +4376,14 @@
         <p:cNvGrpSpPr/>
         <p:nvPr/>
       </p:nvGrpSpPr>
-      <p:grpSpPr/>
+      <p:grpSpPr>
+        <a:xfrm>
+          <a:off x="0" y="0"/>
+          <a:ext cx="0" cy="0"/>
+          <a:chOff x="0" y="0"/>
+          <a:chExt cx="0" cy="0"/>
+        </a:xfrm>
+      </p:grpSpPr>
       <p:sp>
         <p:nvSpPr>
           <p:cNvPr id="2" name="TextBox 1"/>
@@ -4374,7 +4412,7 @@
                   <a:srgbClr val="000000"/>
                 </a:solidFill>
               </a:rPr>
-              <a:t>Scenario B — Pad mreze i automatski oporavak</a:t>
+              <a:t>Scenario C — Nagli porast opterecenja (Burst Load)</a:t>
             </a:r>
           </a:p>
         </p:txBody>
@@ -4412,7 +4450,7 @@
 </file>
 
 <file path=ppt/slides/slide6.xml><?xml version="1.0" encoding="utf-8"?>
-<p:sld xmlns:a="http://schemas.openxmlformats.org/drawingml/2006/main" xmlns:p="http://schemas.openxmlformats.org/presentationml/2006/main" xmlns:r="http://schemas.openxmlformats.org/officeDocument/2006/relationships">
+<p:sld xmlns:a="http://schemas.openxmlformats.org/drawingml/2006/main" xmlns:r="http://schemas.openxmlformats.org/officeDocument/2006/relationships" xmlns:p="http://schemas.openxmlformats.org/presentationml/2006/main">
   <p:cSld>
     <p:bg>
       <p:bgPr>
@@ -4428,7 +4466,14 @@
         <p:cNvGrpSpPr/>
         <p:nvPr/>
       </p:nvGrpSpPr>
-      <p:grpSpPr/>
+      <p:grpSpPr>
+        <a:xfrm>
+          <a:off x="0" y="0"/>
+          <a:ext cx="0" cy="0"/>
+          <a:chOff x="0" y="0"/>
+          <a:chExt cx="0" cy="0"/>
+        </a:xfrm>
+      </p:grpSpPr>
       <p:sp>
         <p:nvSpPr>
           <p:cNvPr id="2" name="TextBox 1"/>
@@ -4495,7 +4540,7 @@
 </file>
 
 <file path=ppt/slides/slide7.xml><?xml version="1.0" encoding="utf-8"?>
-<p:sld xmlns:a="http://schemas.openxmlformats.org/drawingml/2006/main" xmlns:p="http://schemas.openxmlformats.org/presentationml/2006/main" xmlns:r="http://schemas.openxmlformats.org/officeDocument/2006/relationships">
+<p:sld xmlns:a="http://schemas.openxmlformats.org/drawingml/2006/main" xmlns:r="http://schemas.openxmlformats.org/officeDocument/2006/relationships" xmlns:p="http://schemas.openxmlformats.org/presentationml/2006/main">
   <p:cSld>
     <p:bg>
       <p:bgPr>
@@ -4511,7 +4556,14 @@
         <p:cNvGrpSpPr/>
         <p:nvPr/>
       </p:nvGrpSpPr>
-      <p:grpSpPr/>
+      <p:grpSpPr>
+        <a:xfrm>
+          <a:off x="0" y="0"/>
+          <a:ext cx="0" cy="0"/>
+          <a:chOff x="0" y="0"/>
+          <a:chExt cx="0" cy="0"/>
+        </a:xfrm>
+      </p:grpSpPr>
       <p:sp>
         <p:nvSpPr>
           <p:cNvPr id="2" name="TextBox 1"/>
@@ -4578,7 +4630,7 @@
 </file>
 
 <file path=ppt/slides/slide8.xml><?xml version="1.0" encoding="utf-8"?>
-<p:sld xmlns:a="http://schemas.openxmlformats.org/drawingml/2006/main" xmlns:p="http://schemas.openxmlformats.org/presentationml/2006/main" xmlns:r="http://schemas.openxmlformats.org/officeDocument/2006/relationships">
+<p:sld xmlns:a="http://schemas.openxmlformats.org/drawingml/2006/main" xmlns:r="http://schemas.openxmlformats.org/officeDocument/2006/relationships" xmlns:p="http://schemas.openxmlformats.org/presentationml/2006/main">
   <p:cSld>
     <p:bg>
       <p:bgPr>
@@ -4594,7 +4646,14 @@
         <p:cNvGrpSpPr/>
         <p:nvPr/>
       </p:nvGrpSpPr>
-      <p:grpSpPr/>
+      <p:grpSpPr>
+        <a:xfrm>
+          <a:off x="0" y="0"/>
+          <a:ext cx="0" cy="0"/>
+          <a:chOff x="0" y="0"/>
+          <a:chExt cx="0" cy="0"/>
+        </a:xfrm>
+      </p:grpSpPr>
       <p:sp>
         <p:nvSpPr>
           <p:cNvPr id="2" name="TextBox 1"/>
@@ -4650,14 +4709,7 @@
           </a:bodyPr>
           <a:lstStyle/>
           <a:p>
-            <a:r>
-              <a:rPr sz="900" b="1">
-                <a:solidFill>
-                  <a:srgbClr val="000000"/>
-                </a:solidFill>
-              </a:rPr>
-              <a:t/>
-            </a:r>
+            <a:endParaRPr/>
           </a:p>
         </p:txBody>
       </p:sp>
@@ -5661,7 +5713,7 @@
 </file>
 
 <file path=ppt/slides/slide9.xml><?xml version="1.0" encoding="utf-8"?>
-<p:sld xmlns:a="http://schemas.openxmlformats.org/drawingml/2006/main" xmlns:p="http://schemas.openxmlformats.org/presentationml/2006/main" xmlns:r="http://schemas.openxmlformats.org/officeDocument/2006/relationships">
+<p:sld xmlns:a="http://schemas.openxmlformats.org/drawingml/2006/main" xmlns:r="http://schemas.openxmlformats.org/officeDocument/2006/relationships" xmlns:p="http://schemas.openxmlformats.org/presentationml/2006/main">
   <p:cSld>
     <p:bg>
       <p:bgPr>
@@ -5677,7 +5729,14 @@
         <p:cNvGrpSpPr/>
         <p:nvPr/>
       </p:nvGrpSpPr>
-      <p:grpSpPr/>
+      <p:grpSpPr>
+        <a:xfrm>
+          <a:off x="0" y="0"/>
+          <a:ext cx="0" cy="0"/>
+          <a:chOff x="0" y="0"/>
+          <a:chExt cx="0" cy="0"/>
+        </a:xfrm>
+      </p:grpSpPr>
       <p:sp>
         <p:nvSpPr>
           <p:cNvPr id="2" name="TextBox 1"/>
